--- a/public/course-materials/pptx/Module-11-Aller-plus-loin-sessions-en-direct.pptx
+++ b/public/course-materials/pptx/Module-11-Aller-plus-loin-sessions-en-direct.pptx
@@ -3616,7 +3616,7 @@
     <p:bg>
       <p:bgPr>
         <a:solidFill>
-          <a:srgbClr val="0F1419"/>
+          <a:srgbClr val="0F1214"/>
         </a:solidFill>
       </p:bgPr>
     </p:bg>
@@ -3649,7 +3649,7 @@
             <a:avLst/>
           </a:prstGeom>
           <a:solidFill>
-            <a:srgbClr val="3B82F6">
+            <a:srgbClr val="3B968F">
               <a:alpha val="8000"/>
             </a:srgbClr>
           </a:solidFill>
@@ -3671,7 +3671,7 @@
             <a:avLst/>
           </a:prstGeom>
           <a:solidFill>
-            <a:srgbClr val="3B82F6">
+            <a:srgbClr val="3B968F">
               <a:alpha val="5000"/>
             </a:srgbClr>
           </a:solidFill>
@@ -3693,7 +3693,7 @@
             <a:avLst/>
           </a:prstGeom>
           <a:solidFill>
-            <a:srgbClr val="3B82F6"/>
+            <a:srgbClr val="3B968F"/>
           </a:solidFill>
           <a:ln/>
         </p:spPr>
@@ -3749,7 +3749,7 @@
             <a:r>
               <a:rPr lang="en-US" sz="1300" b="1" spc="400" kern="0" dirty="0">
                 <a:solidFill>
-                  <a:srgbClr val="3B82F6"/>
+                  <a:srgbClr val="3B968F"/>
                 </a:solidFill>
                 <a:latin typeface="Calibri" pitchFamily="34" charset="0"/>
                 <a:ea typeface="Calibri" pitchFamily="34" charset="-122"/>
@@ -3815,7 +3815,7 @@
             <a:avLst/>
           </a:prstGeom>
           <a:solidFill>
-            <a:srgbClr val="3B82F6"/>
+            <a:srgbClr val="3B968F"/>
           </a:solidFill>
           <a:ln/>
         </p:spPr>
@@ -3847,7 +3847,7 @@
             <a:r>
               <a:rPr lang="en-US" sz="1100" spc="300" kern="0" dirty="0">
                 <a:solidFill>
-                  <a:srgbClr val="64748B"/>
+                  <a:srgbClr val="5B6672"/>
                 </a:solidFill>
                 <a:latin typeface="Calibri" pitchFamily="34" charset="0"/>
                 <a:ea typeface="Calibri" pitchFamily="34" charset="-122"/>
@@ -3886,7 +3886,7 @@
             <a:r>
               <a:rPr lang="en-US" sz="1100" dirty="0">
                 <a:solidFill>
-                  <a:srgbClr val="94A3B8"/>
+                  <a:srgbClr val="8994A0"/>
                 </a:solidFill>
                 <a:latin typeface="Calibri" pitchFamily="34" charset="0"/>
                 <a:ea typeface="Calibri" pitchFamily="34" charset="-122"/>
@@ -3912,7 +3912,7 @@
     <p:bg>
       <p:bgPr>
         <a:solidFill>
-          <a:srgbClr val="0D2137"/>
+          <a:srgbClr val="12181D"/>
         </a:solidFill>
       </p:bgPr>
     </p:bg>
@@ -3993,7 +3993,7 @@
             <a:avLst/>
           </a:prstGeom>
           <a:solidFill>
-            <a:srgbClr val="3B82F6">
+            <a:srgbClr val="3B968F">
               <a:alpha val="6000"/>
             </a:srgbClr>
           </a:solidFill>
@@ -4015,7 +4015,7 @@
             <a:avLst/>
           </a:prstGeom>
           <a:solidFill>
-            <a:srgbClr val="3B82F6"/>
+            <a:srgbClr val="3B968F"/>
           </a:solidFill>
           <a:ln/>
         </p:spPr>
@@ -4047,7 +4047,7 @@
             <a:r>
               <a:rPr lang="en-US" sz="1200" b="1" spc="200" kern="0" dirty="0">
                 <a:solidFill>
-                  <a:srgbClr val="3B82F6"/>
+                  <a:srgbClr val="3B968F"/>
                 </a:solidFill>
                 <a:latin typeface="Calibri" pitchFamily="34" charset="0"/>
                 <a:ea typeface="Calibri" pitchFamily="34" charset="-122"/>
@@ -4125,7 +4125,7 @@
             <a:r>
               <a:rPr lang="en-US" sz="1100" dirty="0">
                 <a:solidFill>
-                  <a:srgbClr val="64748B"/>
+                  <a:srgbClr val="5B6672"/>
                 </a:solidFill>
                 <a:latin typeface="Calibri" pitchFamily="34" charset="0"/>
                 <a:ea typeface="Calibri" pitchFamily="34" charset="-122"/>
@@ -4151,7 +4151,7 @@
     <p:bg>
       <p:bgPr>
         <a:solidFill>
-          <a:srgbClr val="0F1419"/>
+          <a:srgbClr val="0F1214"/>
         </a:solidFill>
       </p:bgPr>
     </p:bg>
@@ -4184,7 +4184,7 @@
             <a:avLst/>
           </a:prstGeom>
           <a:solidFill>
-            <a:srgbClr val="3B82F6">
+            <a:srgbClr val="3B968F">
               <a:alpha val="12000"/>
             </a:srgbClr>
           </a:solidFill>
@@ -4285,7 +4285,7 @@
             <a:r>
               <a:rPr lang="en-US" sz="900" dirty="0">
                 <a:solidFill>
-                  <a:srgbClr val="64748B"/>
+                  <a:srgbClr val="5B6672"/>
                 </a:solidFill>
                 <a:latin typeface="Calibri" pitchFamily="34" charset="0"/>
                 <a:ea typeface="Calibri" pitchFamily="34" charset="-122"/>
@@ -4311,7 +4311,7 @@
     <p:bg>
       <p:bgPr>
         <a:solidFill>
-          <a:srgbClr val="0F1419"/>
+          <a:srgbClr val="0F1214"/>
         </a:solidFill>
       </p:bgPr>
     </p:bg>
@@ -4356,7 +4356,7 @@
             <a:r>
               <a:rPr lang="en-US" sz="2000" b="1" dirty="0">
                 <a:solidFill>
-                  <a:srgbClr val="3B82F6"/>
+                  <a:srgbClr val="3B968F"/>
                 </a:solidFill>
                 <a:latin typeface="Calibri" pitchFamily="34" charset="0"/>
                 <a:ea typeface="Calibri" pitchFamily="34" charset="-122"/>
@@ -4449,7 +4449,7 @@
             </a:avLst>
           </a:prstGeom>
           <a:solidFill>
-            <a:srgbClr val="1A2332"/>
+            <a:srgbClr val="1A2026"/>
           </a:solidFill>
           <a:ln/>
         </p:spPr>
@@ -4531,7 +4531,7 @@
     <p:bg>
       <p:bgPr>
         <a:solidFill>
-          <a:srgbClr val="0F1419"/>
+          <a:srgbClr val="0F1214"/>
         </a:solidFill>
       </p:bgPr>
     </p:bg>
@@ -4576,7 +4576,7 @@
             <a:r>
               <a:rPr lang="en-US" sz="2000" b="1" dirty="0">
                 <a:solidFill>
-                  <a:srgbClr val="3B82F6"/>
+                  <a:srgbClr val="3B968F"/>
                 </a:solidFill>
                 <a:latin typeface="Calibri" pitchFamily="34" charset="0"/>
                 <a:ea typeface="Calibri" pitchFamily="34" charset="-122"/>
@@ -4605,7 +4605,7 @@
             </a:avLst>
           </a:prstGeom>
           <a:solidFill>
-            <a:srgbClr val="1A2332"/>
+            <a:srgbClr val="1A2026"/>
           </a:solidFill>
           <a:ln/>
         </p:spPr>
@@ -4690,7 +4690,7 @@
             </a:avLst>
           </a:prstGeom>
           <a:solidFill>
-            <a:srgbClr val="1A2332"/>
+            <a:srgbClr val="1A2026"/>
           </a:solidFill>
           <a:ln/>
         </p:spPr>
@@ -4775,7 +4775,7 @@
             </a:avLst>
           </a:prstGeom>
           <a:solidFill>
-            <a:srgbClr val="1A2332"/>
+            <a:srgbClr val="1A2026"/>
           </a:solidFill>
           <a:ln/>
         </p:spPr>
@@ -4860,7 +4860,7 @@
             </a:avLst>
           </a:prstGeom>
           <a:solidFill>
-            <a:srgbClr val="1A2332"/>
+            <a:srgbClr val="1A2026"/>
           </a:solidFill>
           <a:ln/>
         </p:spPr>
@@ -4942,7 +4942,7 @@
     <p:bg>
       <p:bgPr>
         <a:solidFill>
-          <a:srgbClr val="0F1419"/>
+          <a:srgbClr val="0F1214"/>
         </a:solidFill>
       </p:bgPr>
     </p:bg>
@@ -4975,7 +4975,7 @@
             <a:avLst/>
           </a:prstGeom>
           <a:solidFill>
-            <a:srgbClr val="3B82F6">
+            <a:srgbClr val="3B968F">
               <a:alpha val="12000"/>
             </a:srgbClr>
           </a:solidFill>
@@ -5033,7 +5033,7 @@
             <a:r>
               <a:rPr lang="en-US" sz="2000" b="1" dirty="0">
                 <a:solidFill>
-                  <a:srgbClr val="3B82F6"/>
+                  <a:srgbClr val="3B968F"/>
                 </a:solidFill>
                 <a:latin typeface="Calibri" pitchFamily="34" charset="0"/>
                 <a:ea typeface="Calibri" pitchFamily="34" charset="-122"/>
@@ -5157,7 +5157,7 @@
             <a:r>
               <a:rPr lang="en-US" sz="900" dirty="0">
                 <a:solidFill>
-                  <a:srgbClr val="64748B"/>
+                  <a:srgbClr val="5B6672"/>
                 </a:solidFill>
                 <a:latin typeface="Calibri" pitchFamily="34" charset="0"/>
                 <a:ea typeface="Calibri" pitchFamily="34" charset="-122"/>
@@ -5183,7 +5183,7 @@
     <p:bg>
       <p:bgPr>
         <a:solidFill>
-          <a:srgbClr val="0F1419"/>
+          <a:srgbClr val="0F1214"/>
         </a:solidFill>
       </p:bgPr>
     </p:bg>
@@ -5228,7 +5228,7 @@
             <a:r>
               <a:rPr lang="en-US" sz="2000" b="1" dirty="0">
                 <a:solidFill>
-                  <a:srgbClr val="3B82F6"/>
+                  <a:srgbClr val="3B968F"/>
                 </a:solidFill>
                 <a:latin typeface="Calibri" pitchFamily="34" charset="0"/>
                 <a:ea typeface="Calibri" pitchFamily="34" charset="-122"/>
@@ -5321,7 +5321,7 @@
             </a:avLst>
           </a:prstGeom>
           <a:solidFill>
-            <a:srgbClr val="1A2332"/>
+            <a:srgbClr val="1A2026"/>
           </a:solidFill>
           <a:ln/>
         </p:spPr>
@@ -5403,7 +5403,7 @@
     <p:bg>
       <p:bgPr>
         <a:solidFill>
-          <a:srgbClr val="0F1419"/>
+          <a:srgbClr val="0F1214"/>
         </a:solidFill>
       </p:bgPr>
     </p:bg>
@@ -5436,7 +5436,7 @@
             <a:avLst/>
           </a:prstGeom>
           <a:solidFill>
-            <a:srgbClr val="3B82F6">
+            <a:srgbClr val="3B968F">
               <a:alpha val="12000"/>
             </a:srgbClr>
           </a:solidFill>
@@ -5494,7 +5494,7 @@
             <a:r>
               <a:rPr lang="en-US" sz="2000" b="1" dirty="0">
                 <a:solidFill>
-                  <a:srgbClr val="3B82F6"/>
+                  <a:srgbClr val="3B968F"/>
                 </a:solidFill>
                 <a:latin typeface="Calibri" pitchFamily="34" charset="0"/>
                 <a:ea typeface="Calibri" pitchFamily="34" charset="-122"/>
@@ -5597,7 +5597,7 @@
             <a:r>
               <a:rPr lang="en-US" sz="900" dirty="0">
                 <a:solidFill>
-                  <a:srgbClr val="64748B"/>
+                  <a:srgbClr val="5B6672"/>
                 </a:solidFill>
                 <a:latin typeface="Calibri" pitchFamily="34" charset="0"/>
                 <a:ea typeface="Calibri" pitchFamily="34" charset="-122"/>
@@ -5623,7 +5623,7 @@
     <p:bg>
       <p:bgPr>
         <a:solidFill>
-          <a:srgbClr val="1A2332"/>
+          <a:srgbClr val="1A2026"/>
         </a:solidFill>
       </p:bgPr>
     </p:bg>
@@ -5692,7 +5692,7 @@
             <a:r>
               <a:rPr lang="en-US" sz="1200" b="1" spc="300" kern="0" dirty="0">
                 <a:solidFill>
-                  <a:srgbClr val="F59E0B"/>
+                  <a:srgbClr val="5BC1B8"/>
                 </a:solidFill>
                 <a:latin typeface="Calibri" pitchFamily="34" charset="0"/>
                 <a:ea typeface="Calibri" pitchFamily="34" charset="-122"/>
@@ -5760,7 +5760,7 @@
             </a:avLst>
           </a:prstGeom>
           <a:solidFill>
-            <a:srgbClr val="0F1419"/>
+            <a:srgbClr val="0F1214"/>
           </a:solidFill>
           <a:ln/>
         </p:spPr>
@@ -5782,7 +5782,7 @@
             </a:avLst>
           </a:prstGeom>
           <a:solidFill>
-            <a:srgbClr val="3B82F6"/>
+            <a:srgbClr val="3B968F"/>
           </a:solidFill>
           <a:ln/>
         </p:spPr>
@@ -5796,7 +5796,7 @@
             <a:r>
               <a:rPr lang="en-US" sz="1500" b="1" dirty="0">
                 <a:solidFill>
-                  <a:srgbClr val="0F1419"/>
+                  <a:srgbClr val="0F1214"/>
                 </a:solidFill>
                 <a:latin typeface="Calibri" pitchFamily="34" charset="0"/>
                 <a:ea typeface="Calibri" pitchFamily="34" charset="-122"/>
@@ -5864,7 +5864,7 @@
             </a:avLst>
           </a:prstGeom>
           <a:solidFill>
-            <a:srgbClr val="0F1419"/>
+            <a:srgbClr val="0F1214"/>
           </a:solidFill>
           <a:ln/>
         </p:spPr>
@@ -5886,7 +5886,7 @@
             </a:avLst>
           </a:prstGeom>
           <a:solidFill>
-            <a:srgbClr val="3B82F6"/>
+            <a:srgbClr val="3B968F"/>
           </a:solidFill>
           <a:ln/>
         </p:spPr>
@@ -5900,7 +5900,7 @@
             <a:r>
               <a:rPr lang="en-US" sz="1500" b="1" dirty="0">
                 <a:solidFill>
-                  <a:srgbClr val="0F1419"/>
+                  <a:srgbClr val="0F1214"/>
                 </a:solidFill>
                 <a:latin typeface="Calibri" pitchFamily="34" charset="0"/>
                 <a:ea typeface="Calibri" pitchFamily="34" charset="-122"/>
@@ -5968,7 +5968,7 @@
             </a:avLst>
           </a:prstGeom>
           <a:solidFill>
-            <a:srgbClr val="0F1419"/>
+            <a:srgbClr val="0F1214"/>
           </a:solidFill>
           <a:ln/>
         </p:spPr>
@@ -5990,7 +5990,7 @@
             </a:avLst>
           </a:prstGeom>
           <a:solidFill>
-            <a:srgbClr val="3B82F6"/>
+            <a:srgbClr val="3B968F"/>
           </a:solidFill>
           <a:ln/>
         </p:spPr>
@@ -6004,7 +6004,7 @@
             <a:r>
               <a:rPr lang="en-US" sz="1500" b="1" dirty="0">
                 <a:solidFill>
-                  <a:srgbClr val="0F1419"/>
+                  <a:srgbClr val="0F1214"/>
                 </a:solidFill>
                 <a:latin typeface="Calibri" pitchFamily="34" charset="0"/>
                 <a:ea typeface="Calibri" pitchFamily="34" charset="-122"/>
@@ -6072,7 +6072,7 @@
             </a:avLst>
           </a:prstGeom>
           <a:solidFill>
-            <a:srgbClr val="0F1419"/>
+            <a:srgbClr val="0F1214"/>
           </a:solidFill>
           <a:ln/>
         </p:spPr>
@@ -6094,7 +6094,7 @@
             </a:avLst>
           </a:prstGeom>
           <a:solidFill>
-            <a:srgbClr val="3B82F6"/>
+            <a:srgbClr val="3B968F"/>
           </a:solidFill>
           <a:ln/>
         </p:spPr>
@@ -6108,7 +6108,7 @@
             <a:r>
               <a:rPr lang="en-US" sz="1500" b="1" dirty="0">
                 <a:solidFill>
-                  <a:srgbClr val="0F1419"/>
+                  <a:srgbClr val="0F1214"/>
                 </a:solidFill>
                 <a:latin typeface="Calibri" pitchFamily="34" charset="0"/>
                 <a:ea typeface="Calibri" pitchFamily="34" charset="-122"/>
@@ -6176,7 +6176,7 @@
             </a:avLst>
           </a:prstGeom>
           <a:solidFill>
-            <a:srgbClr val="0F1419"/>
+            <a:srgbClr val="0F1214"/>
           </a:solidFill>
           <a:ln/>
         </p:spPr>
@@ -6198,7 +6198,7 @@
             </a:avLst>
           </a:prstGeom>
           <a:solidFill>
-            <a:srgbClr val="3B82F6"/>
+            <a:srgbClr val="3B968F"/>
           </a:solidFill>
           <a:ln/>
         </p:spPr>
@@ -6212,7 +6212,7 @@
             <a:r>
               <a:rPr lang="en-US" sz="1500" b="1" dirty="0">
                 <a:solidFill>
-                  <a:srgbClr val="0F1419"/>
+                  <a:srgbClr val="0F1214"/>
                 </a:solidFill>
                 <a:latin typeface="Calibri" pitchFamily="34" charset="0"/>
                 <a:ea typeface="Calibri" pitchFamily="34" charset="-122"/>
@@ -6277,7 +6277,7 @@
     <p:bg>
       <p:bgPr>
         <a:solidFill>
-          <a:srgbClr val="0D2137"/>
+          <a:srgbClr val="12181D"/>
         </a:solidFill>
       </p:bgPr>
     </p:bg>
@@ -6358,7 +6358,7 @@
             <a:avLst/>
           </a:prstGeom>
           <a:solidFill>
-            <a:srgbClr val="3B82F6">
+            <a:srgbClr val="3B968F">
               <a:alpha val="6000"/>
             </a:srgbClr>
           </a:solidFill>
@@ -6380,7 +6380,7 @@
             <a:avLst/>
           </a:prstGeom>
           <a:solidFill>
-            <a:srgbClr val="3B82F6"/>
+            <a:srgbClr val="3B968F"/>
           </a:solidFill>
           <a:ln/>
         </p:spPr>
@@ -6412,7 +6412,7 @@
             <a:r>
               <a:rPr lang="en-US" sz="1200" b="1" spc="200" kern="0" dirty="0">
                 <a:solidFill>
-                  <a:srgbClr val="3B82F6"/>
+                  <a:srgbClr val="3B968F"/>
                 </a:solidFill>
                 <a:latin typeface="Calibri" pitchFamily="34" charset="0"/>
                 <a:ea typeface="Calibri" pitchFamily="34" charset="-122"/>
@@ -6490,7 +6490,7 @@
             <a:r>
               <a:rPr lang="en-US" sz="1100" dirty="0">
                 <a:solidFill>
-                  <a:srgbClr val="64748B"/>
+                  <a:srgbClr val="5B6672"/>
                 </a:solidFill>
                 <a:latin typeface="Calibri" pitchFamily="34" charset="0"/>
                 <a:ea typeface="Calibri" pitchFamily="34" charset="-122"/>
@@ -6516,7 +6516,7 @@
     <p:bg>
       <p:bgPr>
         <a:solidFill>
-          <a:srgbClr val="0F1419"/>
+          <a:srgbClr val="0F1214"/>
         </a:solidFill>
       </p:bgPr>
     </p:bg>
@@ -6549,7 +6549,7 @@
             <a:avLst/>
           </a:prstGeom>
           <a:solidFill>
-            <a:srgbClr val="3B82F6">
+            <a:srgbClr val="3B968F">
               <a:alpha val="12000"/>
             </a:srgbClr>
           </a:solidFill>
@@ -6692,7 +6692,7 @@
             <a:r>
               <a:rPr lang="en-US" sz="900" dirty="0">
                 <a:solidFill>
-                  <a:srgbClr val="64748B"/>
+                  <a:srgbClr val="5B6672"/>
                 </a:solidFill>
                 <a:latin typeface="Calibri" pitchFamily="34" charset="0"/>
                 <a:ea typeface="Calibri" pitchFamily="34" charset="-122"/>
@@ -6718,7 +6718,7 @@
     <p:bg>
       <p:bgPr>
         <a:solidFill>
-          <a:srgbClr val="0F1419"/>
+          <a:srgbClr val="0F1214"/>
         </a:solidFill>
       </p:bgPr>
     </p:bg>
@@ -6763,7 +6763,7 @@
             <a:r>
               <a:rPr lang="en-US" sz="1200" b="1" spc="300" kern="0" dirty="0">
                 <a:solidFill>
-                  <a:srgbClr val="3B82F6"/>
+                  <a:srgbClr val="3B968F"/>
                 </a:solidFill>
                 <a:latin typeface="Calibri" pitchFamily="34" charset="0"/>
                 <a:ea typeface="Calibri" pitchFamily="34" charset="-122"/>
@@ -6831,7 +6831,7 @@
             </a:avLst>
           </a:prstGeom>
           <a:solidFill>
-            <a:srgbClr val="1A2332"/>
+            <a:srgbClr val="1A2026"/>
           </a:solidFill>
           <a:ln/>
         </p:spPr>
@@ -6863,7 +6863,7 @@
             <a:r>
               <a:rPr lang="en-US" sz="1300" b="1" dirty="0">
                 <a:solidFill>
-                  <a:srgbClr val="3B82F6"/>
+                  <a:srgbClr val="3B968F"/>
                 </a:solidFill>
                 <a:latin typeface="Calibri" pitchFamily="34" charset="0"/>
                 <a:ea typeface="Calibri" pitchFamily="34" charset="-122"/>
@@ -6955,7 +6955,7 @@
             </a:avLst>
           </a:prstGeom>
           <a:solidFill>
-            <a:srgbClr val="1A2332"/>
+            <a:srgbClr val="1A2026"/>
           </a:solidFill>
           <a:ln/>
         </p:spPr>
@@ -6987,7 +6987,7 @@
             <a:r>
               <a:rPr lang="en-US" sz="1300" b="1" dirty="0">
                 <a:solidFill>
-                  <a:srgbClr val="3B82F6"/>
+                  <a:srgbClr val="3B968F"/>
                 </a:solidFill>
                 <a:latin typeface="Calibri" pitchFamily="34" charset="0"/>
                 <a:ea typeface="Calibri" pitchFamily="34" charset="-122"/>
@@ -7079,7 +7079,7 @@
             </a:avLst>
           </a:prstGeom>
           <a:solidFill>
-            <a:srgbClr val="1A2332"/>
+            <a:srgbClr val="1A2026"/>
           </a:solidFill>
           <a:ln/>
         </p:spPr>
@@ -7111,7 +7111,7 @@
             <a:r>
               <a:rPr lang="en-US" sz="1300" b="1" dirty="0">
                 <a:solidFill>
-                  <a:srgbClr val="3B82F6"/>
+                  <a:srgbClr val="3B968F"/>
                 </a:solidFill>
                 <a:latin typeface="Calibri" pitchFamily="34" charset="0"/>
                 <a:ea typeface="Calibri" pitchFamily="34" charset="-122"/>
@@ -7203,7 +7203,7 @@
             </a:avLst>
           </a:prstGeom>
           <a:solidFill>
-            <a:srgbClr val="1A2332"/>
+            <a:srgbClr val="1A2026"/>
           </a:solidFill>
           <a:ln/>
         </p:spPr>
@@ -7235,7 +7235,7 @@
             <a:r>
               <a:rPr lang="en-US" sz="1300" b="1" dirty="0">
                 <a:solidFill>
-                  <a:srgbClr val="3B82F6"/>
+                  <a:srgbClr val="3B968F"/>
                 </a:solidFill>
                 <a:latin typeface="Calibri" pitchFamily="34" charset="0"/>
                 <a:ea typeface="Calibri" pitchFamily="34" charset="-122"/>
@@ -7324,7 +7324,7 @@
     <p:bg>
       <p:bgPr>
         <a:solidFill>
-          <a:srgbClr val="0F1419"/>
+          <a:srgbClr val="0F1214"/>
         </a:solidFill>
       </p:bgPr>
     </p:bg>
@@ -7357,7 +7357,7 @@
             <a:avLst/>
           </a:prstGeom>
           <a:solidFill>
-            <a:srgbClr val="3B82F6">
+            <a:srgbClr val="3B968F">
               <a:alpha val="12000"/>
             </a:srgbClr>
           </a:solidFill>
@@ -7415,7 +7415,7 @@
             <a:r>
               <a:rPr lang="en-US" sz="2000" b="1" dirty="0">
                 <a:solidFill>
-                  <a:srgbClr val="3B82F6"/>
+                  <a:srgbClr val="3B968F"/>
                 </a:solidFill>
                 <a:latin typeface="Calibri" pitchFamily="34" charset="0"/>
                 <a:ea typeface="Calibri" pitchFamily="34" charset="-122"/>
@@ -7518,7 +7518,7 @@
             <a:r>
               <a:rPr lang="en-US" sz="900" dirty="0">
                 <a:solidFill>
-                  <a:srgbClr val="64748B"/>
+                  <a:srgbClr val="5B6672"/>
                 </a:solidFill>
                 <a:latin typeface="Calibri" pitchFamily="34" charset="0"/>
                 <a:ea typeface="Calibri" pitchFamily="34" charset="-122"/>
@@ -7544,7 +7544,7 @@
     <p:bg>
       <p:bgPr>
         <a:solidFill>
-          <a:srgbClr val="0F1419"/>
+          <a:srgbClr val="0F1214"/>
         </a:solidFill>
       </p:bgPr>
     </p:bg>
@@ -7589,7 +7589,7 @@
             <a:r>
               <a:rPr lang="en-US" sz="2000" b="1" dirty="0">
                 <a:solidFill>
-                  <a:srgbClr val="3B82F6"/>
+                  <a:srgbClr val="3B968F"/>
                 </a:solidFill>
                 <a:latin typeface="Calibri" pitchFamily="34" charset="0"/>
                 <a:ea typeface="Calibri" pitchFamily="34" charset="-122"/>
@@ -7618,7 +7618,7 @@
             </a:avLst>
           </a:prstGeom>
           <a:solidFill>
-            <a:srgbClr val="1A2332"/>
+            <a:srgbClr val="1A2026"/>
           </a:solidFill>
           <a:ln/>
         </p:spPr>
@@ -7713,7 +7713,7 @@
             <a:r>
               <a:rPr lang="en-US" sz="900" dirty="0">
                 <a:solidFill>
-                  <a:srgbClr val="94A3B8"/>
+                  <a:srgbClr val="8994A0"/>
                 </a:solidFill>
                 <a:latin typeface="Calibri" pitchFamily="34" charset="0"/>
                 <a:ea typeface="Calibri" pitchFamily="34" charset="-122"/>
@@ -7742,7 +7742,7 @@
             </a:avLst>
           </a:prstGeom>
           <a:solidFill>
-            <a:srgbClr val="1A2332"/>
+            <a:srgbClr val="1A2026"/>
           </a:solidFill>
           <a:ln/>
         </p:spPr>
@@ -7837,7 +7837,7 @@
             <a:r>
               <a:rPr lang="en-US" sz="900" dirty="0">
                 <a:solidFill>
-                  <a:srgbClr val="94A3B8"/>
+                  <a:srgbClr val="8994A0"/>
                 </a:solidFill>
                 <a:latin typeface="Calibri" pitchFamily="34" charset="0"/>
                 <a:ea typeface="Calibri" pitchFamily="34" charset="-122"/>
@@ -7866,7 +7866,7 @@
             </a:avLst>
           </a:prstGeom>
           <a:solidFill>
-            <a:srgbClr val="1A2332"/>
+            <a:srgbClr val="1A2026"/>
           </a:solidFill>
           <a:ln/>
         </p:spPr>
@@ -7961,7 +7961,7 @@
             <a:r>
               <a:rPr lang="en-US" sz="900" dirty="0">
                 <a:solidFill>
-                  <a:srgbClr val="94A3B8"/>
+                  <a:srgbClr val="8994A0"/>
                 </a:solidFill>
                 <a:latin typeface="Calibri" pitchFamily="34" charset="0"/>
                 <a:ea typeface="Calibri" pitchFamily="34" charset="-122"/>
@@ -7990,7 +7990,7 @@
             </a:avLst>
           </a:prstGeom>
           <a:solidFill>
-            <a:srgbClr val="1A2332"/>
+            <a:srgbClr val="1A2026"/>
           </a:solidFill>
           <a:ln/>
         </p:spPr>
@@ -8085,7 +8085,7 @@
             <a:r>
               <a:rPr lang="en-US" sz="900" dirty="0">
                 <a:solidFill>
-                  <a:srgbClr val="94A3B8"/>
+                  <a:srgbClr val="8994A0"/>
                 </a:solidFill>
                 <a:latin typeface="Calibri" pitchFamily="34" charset="0"/>
                 <a:ea typeface="Calibri" pitchFamily="34" charset="-122"/>
@@ -8114,7 +8114,7 @@
             </a:avLst>
           </a:prstGeom>
           <a:solidFill>
-            <a:srgbClr val="1A2332"/>
+            <a:srgbClr val="1A2026"/>
           </a:solidFill>
           <a:ln/>
         </p:spPr>
@@ -8209,7 +8209,7 @@
             <a:r>
               <a:rPr lang="en-US" sz="900" dirty="0">
                 <a:solidFill>
-                  <a:srgbClr val="94A3B8"/>
+                  <a:srgbClr val="8994A0"/>
                 </a:solidFill>
                 <a:latin typeface="Calibri" pitchFamily="34" charset="0"/>
                 <a:ea typeface="Calibri" pitchFamily="34" charset="-122"/>
@@ -8238,7 +8238,7 @@
             </a:avLst>
           </a:prstGeom>
           <a:solidFill>
-            <a:srgbClr val="1A2332"/>
+            <a:srgbClr val="1A2026"/>
           </a:solidFill>
           <a:ln/>
         </p:spPr>
@@ -8333,7 +8333,7 @@
             <a:r>
               <a:rPr lang="en-US" sz="900" dirty="0">
                 <a:solidFill>
-                  <a:srgbClr val="94A3B8"/>
+                  <a:srgbClr val="8994A0"/>
                 </a:solidFill>
                 <a:latin typeface="Calibri" pitchFamily="34" charset="0"/>
                 <a:ea typeface="Calibri" pitchFamily="34" charset="-122"/>
@@ -8359,7 +8359,7 @@
     <p:bg>
       <p:bgPr>
         <a:solidFill>
-          <a:srgbClr val="0F1419"/>
+          <a:srgbClr val="0F1214"/>
         </a:solidFill>
       </p:bgPr>
     </p:bg>
@@ -8392,7 +8392,7 @@
             <a:avLst/>
           </a:prstGeom>
           <a:solidFill>
-            <a:srgbClr val="3B82F6">
+            <a:srgbClr val="3B968F">
               <a:alpha val="12000"/>
             </a:srgbClr>
           </a:solidFill>
@@ -8450,7 +8450,7 @@
             <a:r>
               <a:rPr lang="en-US" sz="2000" b="1" dirty="0">
                 <a:solidFill>
-                  <a:srgbClr val="3B82F6"/>
+                  <a:srgbClr val="3B968F"/>
                 </a:solidFill>
                 <a:latin typeface="Calibri" pitchFamily="34" charset="0"/>
                 <a:ea typeface="Calibri" pitchFamily="34" charset="-122"/>
@@ -8574,7 +8574,7 @@
             <a:r>
               <a:rPr lang="en-US" sz="900" dirty="0">
                 <a:solidFill>
-                  <a:srgbClr val="64748B"/>
+                  <a:srgbClr val="5B6672"/>
                 </a:solidFill>
                 <a:latin typeface="Calibri" pitchFamily="34" charset="0"/>
                 <a:ea typeface="Calibri" pitchFamily="34" charset="-122"/>
@@ -8600,7 +8600,7 @@
     <p:bg>
       <p:bgPr>
         <a:solidFill>
-          <a:srgbClr val="0F1419"/>
+          <a:srgbClr val="0F1214"/>
         </a:solidFill>
       </p:bgPr>
     </p:bg>
@@ -8645,7 +8645,7 @@
             <a:r>
               <a:rPr lang="en-US" sz="2000" b="1" dirty="0">
                 <a:solidFill>
-                  <a:srgbClr val="3B82F6"/>
+                  <a:srgbClr val="3B968F"/>
                 </a:solidFill>
                 <a:latin typeface="Calibri" pitchFamily="34" charset="0"/>
                 <a:ea typeface="Calibri" pitchFamily="34" charset="-122"/>
@@ -8738,7 +8738,7 @@
             </a:avLst>
           </a:prstGeom>
           <a:solidFill>
-            <a:srgbClr val="1A2332"/>
+            <a:srgbClr val="1A2026"/>
           </a:solidFill>
           <a:ln/>
         </p:spPr>
@@ -8820,7 +8820,7 @@
     <p:bg>
       <p:bgPr>
         <a:solidFill>
-          <a:srgbClr val="0F1419"/>
+          <a:srgbClr val="0F1214"/>
         </a:solidFill>
       </p:bgPr>
     </p:bg>
@@ -8875,7 +8875,7 @@
             <a:avLst/>
           </a:prstGeom>
           <a:solidFill>
-            <a:srgbClr val="F59E0B"/>
+            <a:srgbClr val="D97706"/>
           </a:solidFill>
           <a:ln/>
         </p:spPr>
@@ -8931,7 +8931,7 @@
             <a:r>
               <a:rPr lang="en-US" sz="1200" b="1" spc="300" kern="0" dirty="0">
                 <a:solidFill>
-                  <a:srgbClr val="F59E0B"/>
+                  <a:srgbClr val="D97706"/>
                 </a:solidFill>
                 <a:latin typeface="Calibri" pitchFamily="34" charset="0"/>
                 <a:ea typeface="Calibri" pitchFamily="34" charset="-122"/>
@@ -9009,7 +9009,7 @@
             <a:r>
               <a:rPr lang="en-US" sz="1300" dirty="0">
                 <a:solidFill>
-                  <a:srgbClr val="FDE68A"/>
+                  <a:srgbClr val="FBD38D"/>
                 </a:solidFill>
                 <a:latin typeface="Calibri" pitchFamily="34" charset="0"/>
                 <a:ea typeface="Calibri" pitchFamily="34" charset="-122"/>
@@ -9035,7 +9035,7 @@
     <p:bg>
       <p:bgPr>
         <a:solidFill>
-          <a:srgbClr val="1A2332"/>
+          <a:srgbClr val="1A2026"/>
         </a:solidFill>
       </p:bgPr>
     </p:bg>
@@ -9104,7 +9104,7 @@
             <a:r>
               <a:rPr lang="en-US" sz="1200" b="1" spc="300" kern="0" dirty="0">
                 <a:solidFill>
-                  <a:srgbClr val="F59E0B"/>
+                  <a:srgbClr val="5BC1B8"/>
                 </a:solidFill>
                 <a:latin typeface="Calibri" pitchFamily="34" charset="0"/>
                 <a:ea typeface="Calibri" pitchFamily="34" charset="-122"/>
@@ -9172,7 +9172,7 @@
             </a:avLst>
           </a:prstGeom>
           <a:solidFill>
-            <a:srgbClr val="0F1419"/>
+            <a:srgbClr val="0F1214"/>
           </a:solidFill>
           <a:ln/>
         </p:spPr>
@@ -9194,7 +9194,7 @@
             </a:avLst>
           </a:prstGeom>
           <a:solidFill>
-            <a:srgbClr val="3B82F6"/>
+            <a:srgbClr val="3B968F"/>
           </a:solidFill>
           <a:ln/>
         </p:spPr>
@@ -9208,7 +9208,7 @@
             <a:r>
               <a:rPr lang="en-US" sz="1500" b="1" dirty="0">
                 <a:solidFill>
-                  <a:srgbClr val="0F1419"/>
+                  <a:srgbClr val="0F1214"/>
                 </a:solidFill>
                 <a:latin typeface="Calibri" pitchFamily="34" charset="0"/>
                 <a:ea typeface="Calibri" pitchFamily="34" charset="-122"/>
@@ -9276,7 +9276,7 @@
             </a:avLst>
           </a:prstGeom>
           <a:solidFill>
-            <a:srgbClr val="0F1419"/>
+            <a:srgbClr val="0F1214"/>
           </a:solidFill>
           <a:ln/>
         </p:spPr>
@@ -9298,7 +9298,7 @@
             </a:avLst>
           </a:prstGeom>
           <a:solidFill>
-            <a:srgbClr val="3B82F6"/>
+            <a:srgbClr val="3B968F"/>
           </a:solidFill>
           <a:ln/>
         </p:spPr>
@@ -9312,7 +9312,7 @@
             <a:r>
               <a:rPr lang="en-US" sz="1500" b="1" dirty="0">
                 <a:solidFill>
-                  <a:srgbClr val="0F1419"/>
+                  <a:srgbClr val="0F1214"/>
                 </a:solidFill>
                 <a:latin typeface="Calibri" pitchFamily="34" charset="0"/>
                 <a:ea typeface="Calibri" pitchFamily="34" charset="-122"/>
@@ -9380,7 +9380,7 @@
             </a:avLst>
           </a:prstGeom>
           <a:solidFill>
-            <a:srgbClr val="0F1419"/>
+            <a:srgbClr val="0F1214"/>
           </a:solidFill>
           <a:ln/>
         </p:spPr>
@@ -9402,7 +9402,7 @@
             </a:avLst>
           </a:prstGeom>
           <a:solidFill>
-            <a:srgbClr val="3B82F6"/>
+            <a:srgbClr val="3B968F"/>
           </a:solidFill>
           <a:ln/>
         </p:spPr>
@@ -9416,7 +9416,7 @@
             <a:r>
               <a:rPr lang="en-US" sz="1500" b="1" dirty="0">
                 <a:solidFill>
-                  <a:srgbClr val="0F1419"/>
+                  <a:srgbClr val="0F1214"/>
                 </a:solidFill>
                 <a:latin typeface="Calibri" pitchFamily="34" charset="0"/>
                 <a:ea typeface="Calibri" pitchFamily="34" charset="-122"/>
@@ -9484,7 +9484,7 @@
             </a:avLst>
           </a:prstGeom>
           <a:solidFill>
-            <a:srgbClr val="0F1419"/>
+            <a:srgbClr val="0F1214"/>
           </a:solidFill>
           <a:ln/>
         </p:spPr>
@@ -9506,7 +9506,7 @@
             </a:avLst>
           </a:prstGeom>
           <a:solidFill>
-            <a:srgbClr val="3B82F6"/>
+            <a:srgbClr val="3B968F"/>
           </a:solidFill>
           <a:ln/>
         </p:spPr>
@@ -9520,7 +9520,7 @@
             <a:r>
               <a:rPr lang="en-US" sz="1500" b="1" dirty="0">
                 <a:solidFill>
-                  <a:srgbClr val="0F1419"/>
+                  <a:srgbClr val="0F1214"/>
                 </a:solidFill>
                 <a:latin typeface="Calibri" pitchFamily="34" charset="0"/>
                 <a:ea typeface="Calibri" pitchFamily="34" charset="-122"/>
@@ -9588,7 +9588,7 @@
             </a:avLst>
           </a:prstGeom>
           <a:solidFill>
-            <a:srgbClr val="0F1419"/>
+            <a:srgbClr val="0F1214"/>
           </a:solidFill>
           <a:ln/>
         </p:spPr>
@@ -9610,7 +9610,7 @@
             </a:avLst>
           </a:prstGeom>
           <a:solidFill>
-            <a:srgbClr val="3B82F6"/>
+            <a:srgbClr val="3B968F"/>
           </a:solidFill>
           <a:ln/>
         </p:spPr>
@@ -9624,7 +9624,7 @@
             <a:r>
               <a:rPr lang="en-US" sz="1500" b="1" dirty="0">
                 <a:solidFill>
-                  <a:srgbClr val="0F1419"/>
+                  <a:srgbClr val="0F1214"/>
                 </a:solidFill>
                 <a:latin typeface="Calibri" pitchFamily="34" charset="0"/>
                 <a:ea typeface="Calibri" pitchFamily="34" charset="-122"/>
@@ -9689,7 +9689,7 @@
     <p:bg>
       <p:bgPr>
         <a:solidFill>
-          <a:srgbClr val="0D2137"/>
+          <a:srgbClr val="12181D"/>
         </a:solidFill>
       </p:bgPr>
     </p:bg>
@@ -9770,7 +9770,7 @@
             <a:avLst/>
           </a:prstGeom>
           <a:solidFill>
-            <a:srgbClr val="3B82F6">
+            <a:srgbClr val="3B968F">
               <a:alpha val="6000"/>
             </a:srgbClr>
           </a:solidFill>
@@ -9792,7 +9792,7 @@
             <a:avLst/>
           </a:prstGeom>
           <a:solidFill>
-            <a:srgbClr val="3B82F6"/>
+            <a:srgbClr val="3B968F"/>
           </a:solidFill>
           <a:ln/>
         </p:spPr>
@@ -9824,7 +9824,7 @@
             <a:r>
               <a:rPr lang="en-US" sz="1200" b="1" spc="200" kern="0" dirty="0">
                 <a:solidFill>
-                  <a:srgbClr val="3B82F6"/>
+                  <a:srgbClr val="3B968F"/>
                 </a:solidFill>
                 <a:latin typeface="Calibri" pitchFamily="34" charset="0"/>
                 <a:ea typeface="Calibri" pitchFamily="34" charset="-122"/>
@@ -9902,7 +9902,7 @@
             <a:r>
               <a:rPr lang="en-US" sz="1100" dirty="0">
                 <a:solidFill>
-                  <a:srgbClr val="64748B"/>
+                  <a:srgbClr val="5B6672"/>
                 </a:solidFill>
                 <a:latin typeface="Calibri" pitchFamily="34" charset="0"/>
                 <a:ea typeface="Calibri" pitchFamily="34" charset="-122"/>
@@ -9928,7 +9928,7 @@
     <p:bg>
       <p:bgPr>
         <a:solidFill>
-          <a:srgbClr val="0F1419"/>
+          <a:srgbClr val="0F1214"/>
         </a:solidFill>
       </p:bgPr>
     </p:bg>
@@ -9961,7 +9961,7 @@
             <a:avLst/>
           </a:prstGeom>
           <a:solidFill>
-            <a:srgbClr val="3B82F6">
+            <a:srgbClr val="3B968F">
               <a:alpha val="12000"/>
             </a:srgbClr>
           </a:solidFill>
@@ -10188,7 +10188,7 @@
             <a:r>
               <a:rPr lang="en-US" sz="900" dirty="0">
                 <a:solidFill>
-                  <a:srgbClr val="64748B"/>
+                  <a:srgbClr val="5B6672"/>
                 </a:solidFill>
                 <a:latin typeface="Calibri" pitchFamily="34" charset="0"/>
                 <a:ea typeface="Calibri" pitchFamily="34" charset="-122"/>
@@ -10214,7 +10214,7 @@
     <p:bg>
       <p:bgPr>
         <a:solidFill>
-          <a:srgbClr val="0F1419"/>
+          <a:srgbClr val="0F1214"/>
         </a:solidFill>
       </p:bgPr>
     </p:bg>
@@ -10259,7 +10259,7 @@
             <a:r>
               <a:rPr lang="en-US" sz="2000" b="1" dirty="0">
                 <a:solidFill>
-                  <a:srgbClr val="3B82F6"/>
+                  <a:srgbClr val="3B968F"/>
                 </a:solidFill>
                 <a:latin typeface="Calibri" pitchFamily="34" charset="0"/>
                 <a:ea typeface="Calibri" pitchFamily="34" charset="-122"/>
@@ -10352,7 +10352,7 @@
             </a:avLst>
           </a:prstGeom>
           <a:solidFill>
-            <a:srgbClr val="1A2332"/>
+            <a:srgbClr val="1A2026"/>
           </a:solidFill>
           <a:ln/>
         </p:spPr>
@@ -10434,7 +10434,7 @@
     <p:bg>
       <p:bgPr>
         <a:solidFill>
-          <a:srgbClr val="0F1419"/>
+          <a:srgbClr val="0F1214"/>
         </a:solidFill>
       </p:bgPr>
     </p:bg>
@@ -10467,7 +10467,7 @@
             <a:avLst/>
           </a:prstGeom>
           <a:solidFill>
-            <a:srgbClr val="3B82F6">
+            <a:srgbClr val="3B968F">
               <a:alpha val="12000"/>
             </a:srgbClr>
           </a:solidFill>
@@ -10525,7 +10525,7 @@
             <a:r>
               <a:rPr lang="en-US" sz="2000" b="1" dirty="0">
                 <a:solidFill>
-                  <a:srgbClr val="3B82F6"/>
+                  <a:srgbClr val="3B968F"/>
                 </a:solidFill>
                 <a:latin typeface="Calibri" pitchFamily="34" charset="0"/>
                 <a:ea typeface="Calibri" pitchFamily="34" charset="-122"/>
@@ -10628,7 +10628,7 @@
             <a:r>
               <a:rPr lang="en-US" sz="900" dirty="0">
                 <a:solidFill>
-                  <a:srgbClr val="64748B"/>
+                  <a:srgbClr val="5B6672"/>
                 </a:solidFill>
                 <a:latin typeface="Calibri" pitchFamily="34" charset="0"/>
                 <a:ea typeface="Calibri" pitchFamily="34" charset="-122"/>
@@ -10654,7 +10654,7 @@
     <p:bg>
       <p:bgPr>
         <a:solidFill>
-          <a:srgbClr val="0D2137"/>
+          <a:srgbClr val="12181D"/>
         </a:solidFill>
       </p:bgPr>
     </p:bg>
@@ -10735,7 +10735,7 @@
             <a:avLst/>
           </a:prstGeom>
           <a:solidFill>
-            <a:srgbClr val="3B82F6">
+            <a:srgbClr val="3B968F">
               <a:alpha val="6000"/>
             </a:srgbClr>
           </a:solidFill>
@@ -10757,7 +10757,7 @@
             <a:avLst/>
           </a:prstGeom>
           <a:solidFill>
-            <a:srgbClr val="3B82F6"/>
+            <a:srgbClr val="3B968F"/>
           </a:solidFill>
           <a:ln/>
         </p:spPr>
@@ -10789,7 +10789,7 @@
             <a:r>
               <a:rPr lang="en-US" sz="1200" b="1" spc="200" kern="0" dirty="0">
                 <a:solidFill>
-                  <a:srgbClr val="3B82F6"/>
+                  <a:srgbClr val="3B968F"/>
                 </a:solidFill>
                 <a:latin typeface="Calibri" pitchFamily="34" charset="0"/>
                 <a:ea typeface="Calibri" pitchFamily="34" charset="-122"/>
@@ -10867,7 +10867,7 @@
             <a:r>
               <a:rPr lang="en-US" sz="1100" dirty="0">
                 <a:solidFill>
-                  <a:srgbClr val="64748B"/>
+                  <a:srgbClr val="5B6672"/>
                 </a:solidFill>
                 <a:latin typeface="Calibri" pitchFamily="34" charset="0"/>
                 <a:ea typeface="Calibri" pitchFamily="34" charset="-122"/>
@@ -10893,7 +10893,7 @@
     <p:bg>
       <p:bgPr>
         <a:solidFill>
-          <a:srgbClr val="0F1419"/>
+          <a:srgbClr val="0F1214"/>
         </a:solidFill>
       </p:bgPr>
     </p:bg>
@@ -10926,7 +10926,7 @@
             <a:avLst/>
           </a:prstGeom>
           <a:solidFill>
-            <a:srgbClr val="3B82F6">
+            <a:srgbClr val="3B968F">
               <a:alpha val="12000"/>
             </a:srgbClr>
           </a:solidFill>
@@ -10984,7 +10984,7 @@
             <a:r>
               <a:rPr lang="en-US" sz="2000" b="1" dirty="0">
                 <a:solidFill>
-                  <a:srgbClr val="3B82F6"/>
+                  <a:srgbClr val="3B968F"/>
                 </a:solidFill>
                 <a:latin typeface="Calibri" pitchFamily="34" charset="0"/>
                 <a:ea typeface="Calibri" pitchFamily="34" charset="-122"/>
@@ -11129,7 +11129,7 @@
             <a:r>
               <a:rPr lang="en-US" sz="900" dirty="0">
                 <a:solidFill>
-                  <a:srgbClr val="64748B"/>
+                  <a:srgbClr val="5B6672"/>
                 </a:solidFill>
                 <a:latin typeface="Calibri" pitchFamily="34" charset="0"/>
                 <a:ea typeface="Calibri" pitchFamily="34" charset="-122"/>
@@ -11155,7 +11155,7 @@
     <p:bg>
       <p:bgPr>
         <a:solidFill>
-          <a:srgbClr val="1A2332"/>
+          <a:srgbClr val="1A2026"/>
         </a:solidFill>
       </p:bgPr>
     </p:bg>
@@ -11224,7 +11224,7 @@
             <a:r>
               <a:rPr lang="en-US" sz="1200" b="1" spc="300" kern="0" dirty="0">
                 <a:solidFill>
-                  <a:srgbClr val="F59E0B"/>
+                  <a:srgbClr val="5BC1B8"/>
                 </a:solidFill>
                 <a:latin typeface="Calibri" pitchFamily="34" charset="0"/>
                 <a:ea typeface="Calibri" pitchFamily="34" charset="-122"/>
@@ -11292,7 +11292,7 @@
             </a:avLst>
           </a:prstGeom>
           <a:solidFill>
-            <a:srgbClr val="0F1419"/>
+            <a:srgbClr val="0F1214"/>
           </a:solidFill>
           <a:ln/>
         </p:spPr>
@@ -11314,7 +11314,7 @@
             </a:avLst>
           </a:prstGeom>
           <a:solidFill>
-            <a:srgbClr val="3B82F6"/>
+            <a:srgbClr val="3B968F"/>
           </a:solidFill>
           <a:ln/>
         </p:spPr>
@@ -11328,7 +11328,7 @@
             <a:r>
               <a:rPr lang="en-US" sz="1500" b="1" dirty="0">
                 <a:solidFill>
-                  <a:srgbClr val="0F1419"/>
+                  <a:srgbClr val="0F1214"/>
                 </a:solidFill>
                 <a:latin typeface="Calibri" pitchFamily="34" charset="0"/>
                 <a:ea typeface="Calibri" pitchFamily="34" charset="-122"/>
@@ -11396,7 +11396,7 @@
             </a:avLst>
           </a:prstGeom>
           <a:solidFill>
-            <a:srgbClr val="0F1419"/>
+            <a:srgbClr val="0F1214"/>
           </a:solidFill>
           <a:ln/>
         </p:spPr>
@@ -11418,7 +11418,7 @@
             </a:avLst>
           </a:prstGeom>
           <a:solidFill>
-            <a:srgbClr val="3B82F6"/>
+            <a:srgbClr val="3B968F"/>
           </a:solidFill>
           <a:ln/>
         </p:spPr>
@@ -11432,7 +11432,7 @@
             <a:r>
               <a:rPr lang="en-US" sz="1500" b="1" dirty="0">
                 <a:solidFill>
-                  <a:srgbClr val="0F1419"/>
+                  <a:srgbClr val="0F1214"/>
                 </a:solidFill>
                 <a:latin typeface="Calibri" pitchFamily="34" charset="0"/>
                 <a:ea typeface="Calibri" pitchFamily="34" charset="-122"/>
@@ -11500,7 +11500,7 @@
             </a:avLst>
           </a:prstGeom>
           <a:solidFill>
-            <a:srgbClr val="0F1419"/>
+            <a:srgbClr val="0F1214"/>
           </a:solidFill>
           <a:ln/>
         </p:spPr>
@@ -11522,7 +11522,7 @@
             </a:avLst>
           </a:prstGeom>
           <a:solidFill>
-            <a:srgbClr val="3B82F6"/>
+            <a:srgbClr val="3B968F"/>
           </a:solidFill>
           <a:ln/>
         </p:spPr>
@@ -11536,7 +11536,7 @@
             <a:r>
               <a:rPr lang="en-US" sz="1500" b="1" dirty="0">
                 <a:solidFill>
-                  <a:srgbClr val="0F1419"/>
+                  <a:srgbClr val="0F1214"/>
                 </a:solidFill>
                 <a:latin typeface="Calibri" pitchFamily="34" charset="0"/>
                 <a:ea typeface="Calibri" pitchFamily="34" charset="-122"/>
@@ -11604,7 +11604,7 @@
             </a:avLst>
           </a:prstGeom>
           <a:solidFill>
-            <a:srgbClr val="0F1419"/>
+            <a:srgbClr val="0F1214"/>
           </a:solidFill>
           <a:ln/>
         </p:spPr>
@@ -11626,7 +11626,7 @@
             </a:avLst>
           </a:prstGeom>
           <a:solidFill>
-            <a:srgbClr val="3B82F6"/>
+            <a:srgbClr val="3B968F"/>
           </a:solidFill>
           <a:ln/>
         </p:spPr>
@@ -11640,7 +11640,7 @@
             <a:r>
               <a:rPr lang="en-US" sz="1500" b="1" dirty="0">
                 <a:solidFill>
-                  <a:srgbClr val="0F1419"/>
+                  <a:srgbClr val="0F1214"/>
                 </a:solidFill>
                 <a:latin typeface="Calibri" pitchFamily="34" charset="0"/>
                 <a:ea typeface="Calibri" pitchFamily="34" charset="-122"/>
@@ -11708,7 +11708,7 @@
             </a:avLst>
           </a:prstGeom>
           <a:solidFill>
-            <a:srgbClr val="0F1419"/>
+            <a:srgbClr val="0F1214"/>
           </a:solidFill>
           <a:ln/>
         </p:spPr>
@@ -11730,7 +11730,7 @@
             </a:avLst>
           </a:prstGeom>
           <a:solidFill>
-            <a:srgbClr val="3B82F6"/>
+            <a:srgbClr val="3B968F"/>
           </a:solidFill>
           <a:ln/>
         </p:spPr>
@@ -11744,7 +11744,7 @@
             <a:r>
               <a:rPr lang="en-US" sz="1500" b="1" dirty="0">
                 <a:solidFill>
-                  <a:srgbClr val="0F1419"/>
+                  <a:srgbClr val="0F1214"/>
                 </a:solidFill>
                 <a:latin typeface="Calibri" pitchFamily="34" charset="0"/>
                 <a:ea typeface="Calibri" pitchFamily="34" charset="-122"/>
@@ -11809,7 +11809,7 @@
     <p:bg>
       <p:bgPr>
         <a:solidFill>
-          <a:srgbClr val="0F1419"/>
+          <a:srgbClr val="0F1214"/>
         </a:solidFill>
       </p:bgPr>
     </p:bg>
@@ -11842,7 +11842,7 @@
             <a:avLst/>
           </a:prstGeom>
           <a:solidFill>
-            <a:srgbClr val="3B82F6">
+            <a:srgbClr val="3B968F">
               <a:alpha val="6000"/>
             </a:srgbClr>
           </a:solidFill>
@@ -11939,7 +11939,7 @@
             <a:r>
               <a:rPr lang="en-US" sz="1300" dirty="0">
                 <a:solidFill>
-                  <a:srgbClr val="94A3B8"/>
+                  <a:srgbClr val="8994A0"/>
                 </a:solidFill>
                 <a:latin typeface="Calibri" pitchFamily="34" charset="0"/>
                 <a:ea typeface="Calibri" pitchFamily="34" charset="-122"/>
@@ -11966,7 +11966,7 @@
             <a:avLst/>
           </a:prstGeom>
           <a:solidFill>
-            <a:srgbClr val="3B82F6"/>
+            <a:srgbClr val="3B968F"/>
           </a:solidFill>
           <a:ln/>
         </p:spPr>
@@ -11998,7 +11998,7 @@
             <a:r>
               <a:rPr lang="en-US" sz="1100" spc="300" kern="0" dirty="0">
                 <a:solidFill>
-                  <a:srgbClr val="64748B"/>
+                  <a:srgbClr val="5B6672"/>
                 </a:solidFill>
                 <a:latin typeface="Calibri" pitchFamily="34" charset="0"/>
                 <a:ea typeface="Calibri" pitchFamily="34" charset="-122"/>
@@ -12037,7 +12037,7 @@
             <a:r>
               <a:rPr lang="en-US" sz="1100" dirty="0">
                 <a:solidFill>
-                  <a:srgbClr val="009E8B"/>
+                  <a:srgbClr val="000000"/>
                 </a:solidFill>
                 <a:latin typeface="Calibri" pitchFamily="34" charset="0"/>
                 <a:ea typeface="Calibri" pitchFamily="34" charset="-122"/>
@@ -12063,7 +12063,7 @@
     <p:bg>
       <p:bgPr>
         <a:solidFill>
-          <a:srgbClr val="0F1419"/>
+          <a:srgbClr val="0F1214"/>
         </a:solidFill>
       </p:bgPr>
     </p:bg>
@@ -12096,7 +12096,7 @@
             <a:avLst/>
           </a:prstGeom>
           <a:solidFill>
-            <a:srgbClr val="3B82F6">
+            <a:srgbClr val="3B968F">
               <a:alpha val="12000"/>
             </a:srgbClr>
           </a:solidFill>
@@ -12197,7 +12197,7 @@
             <a:r>
               <a:rPr lang="en-US" sz="900" dirty="0">
                 <a:solidFill>
-                  <a:srgbClr val="64748B"/>
+                  <a:srgbClr val="5B6672"/>
                 </a:solidFill>
                 <a:latin typeface="Calibri" pitchFamily="34" charset="0"/>
                 <a:ea typeface="Calibri" pitchFamily="34" charset="-122"/>
@@ -12223,7 +12223,7 @@
     <p:bg>
       <p:bgPr>
         <a:solidFill>
-          <a:srgbClr val="0F1419"/>
+          <a:srgbClr val="0F1214"/>
         </a:solidFill>
       </p:bgPr>
     </p:bg>
@@ -12268,7 +12268,7 @@
             <a:r>
               <a:rPr lang="en-US" sz="2000" b="1" dirty="0">
                 <a:solidFill>
-                  <a:srgbClr val="3B82F6"/>
+                  <a:srgbClr val="3B968F"/>
                 </a:solidFill>
                 <a:latin typeface="Calibri" pitchFamily="34" charset="0"/>
                 <a:ea typeface="Calibri" pitchFamily="34" charset="-122"/>
@@ -12361,7 +12361,7 @@
             </a:avLst>
           </a:prstGeom>
           <a:solidFill>
-            <a:srgbClr val="1A2332"/>
+            <a:srgbClr val="1A2026"/>
           </a:solidFill>
           <a:ln/>
         </p:spPr>
@@ -12446,7 +12446,7 @@
             </a:avLst>
           </a:prstGeom>
           <a:solidFill>
-            <a:srgbClr val="1A2332"/>
+            <a:srgbClr val="1A2026"/>
           </a:solidFill>
           <a:ln/>
         </p:spPr>
@@ -12528,7 +12528,7 @@
     <p:bg>
       <p:bgPr>
         <a:solidFill>
-          <a:srgbClr val="0F1419"/>
+          <a:srgbClr val="0F1214"/>
         </a:solidFill>
       </p:bgPr>
     </p:bg>
@@ -12573,7 +12573,7 @@
             <a:r>
               <a:rPr lang="en-US" sz="2000" b="1" dirty="0">
                 <a:solidFill>
-                  <a:srgbClr val="3B82F6"/>
+                  <a:srgbClr val="3B968F"/>
                 </a:solidFill>
                 <a:latin typeface="Calibri" pitchFamily="34" charset="0"/>
                 <a:ea typeface="Calibri" pitchFamily="34" charset="-122"/>
@@ -12602,7 +12602,7 @@
             </a:avLst>
           </a:prstGeom>
           <a:solidFill>
-            <a:srgbClr val="1A2332"/>
+            <a:srgbClr val="1A2026"/>
           </a:solidFill>
           <a:ln/>
         </p:spPr>
@@ -12687,7 +12687,7 @@
             </a:avLst>
           </a:prstGeom>
           <a:solidFill>
-            <a:srgbClr val="1A2332"/>
+            <a:srgbClr val="1A2026"/>
           </a:solidFill>
           <a:ln/>
         </p:spPr>
@@ -12772,7 +12772,7 @@
             </a:avLst>
           </a:prstGeom>
           <a:solidFill>
-            <a:srgbClr val="1A2332"/>
+            <a:srgbClr val="1A2026"/>
           </a:solidFill>
           <a:ln/>
         </p:spPr>
@@ -12857,7 +12857,7 @@
             </a:avLst>
           </a:prstGeom>
           <a:solidFill>
-            <a:srgbClr val="1A2332"/>
+            <a:srgbClr val="1A2026"/>
           </a:solidFill>
           <a:ln/>
         </p:spPr>
@@ -12939,7 +12939,7 @@
     <p:bg>
       <p:bgPr>
         <a:solidFill>
-          <a:srgbClr val="0F1419"/>
+          <a:srgbClr val="0F1214"/>
         </a:solidFill>
       </p:bgPr>
     </p:bg>
@@ -12972,7 +12972,7 @@
             <a:avLst/>
           </a:prstGeom>
           <a:solidFill>
-            <a:srgbClr val="3B82F6">
+            <a:srgbClr val="3B968F">
               <a:alpha val="12000"/>
             </a:srgbClr>
           </a:solidFill>
@@ -13030,7 +13030,7 @@
             <a:r>
               <a:rPr lang="en-US" sz="2000" b="1" dirty="0">
                 <a:solidFill>
-                  <a:srgbClr val="3B82F6"/>
+                  <a:srgbClr val="3B968F"/>
                 </a:solidFill>
                 <a:latin typeface="Calibri" pitchFamily="34" charset="0"/>
                 <a:ea typeface="Calibri" pitchFamily="34" charset="-122"/>
@@ -13154,7 +13154,7 @@
             <a:r>
               <a:rPr lang="en-US" sz="900" dirty="0">
                 <a:solidFill>
-                  <a:srgbClr val="64748B"/>
+                  <a:srgbClr val="5B6672"/>
                 </a:solidFill>
                 <a:latin typeface="Calibri" pitchFamily="34" charset="0"/>
                 <a:ea typeface="Calibri" pitchFamily="34" charset="-122"/>
@@ -13180,7 +13180,7 @@
     <p:bg>
       <p:bgPr>
         <a:solidFill>
-          <a:srgbClr val="0F1419"/>
+          <a:srgbClr val="0F1214"/>
         </a:solidFill>
       </p:bgPr>
     </p:bg>
@@ -13235,7 +13235,7 @@
             <a:avLst/>
           </a:prstGeom>
           <a:solidFill>
-            <a:srgbClr val="F59E0B"/>
+            <a:srgbClr val="D97706"/>
           </a:solidFill>
           <a:ln/>
         </p:spPr>
@@ -13291,7 +13291,7 @@
             <a:r>
               <a:rPr lang="en-US" sz="1200" b="1" spc="300" kern="0" dirty="0">
                 <a:solidFill>
-                  <a:srgbClr val="F59E0B"/>
+                  <a:srgbClr val="D97706"/>
                 </a:solidFill>
                 <a:latin typeface="Calibri" pitchFamily="34" charset="0"/>
                 <a:ea typeface="Calibri" pitchFamily="34" charset="-122"/>
@@ -13369,7 +13369,7 @@
             <a:r>
               <a:rPr lang="en-US" sz="1300" dirty="0">
                 <a:solidFill>
-                  <a:srgbClr val="FDE68A"/>
+                  <a:srgbClr val="FBD38D"/>
                 </a:solidFill>
                 <a:latin typeface="Calibri" pitchFamily="34" charset="0"/>
                 <a:ea typeface="Calibri" pitchFamily="34" charset="-122"/>
@@ -13395,7 +13395,7 @@
     <p:bg>
       <p:bgPr>
         <a:solidFill>
-          <a:srgbClr val="1A2332"/>
+          <a:srgbClr val="1A2026"/>
         </a:solidFill>
       </p:bgPr>
     </p:bg>
@@ -13464,7 +13464,7 @@
             <a:r>
               <a:rPr lang="en-US" sz="1200" b="1" spc="300" kern="0" dirty="0">
                 <a:solidFill>
-                  <a:srgbClr val="F59E0B"/>
+                  <a:srgbClr val="5BC1B8"/>
                 </a:solidFill>
                 <a:latin typeface="Calibri" pitchFamily="34" charset="0"/>
                 <a:ea typeface="Calibri" pitchFamily="34" charset="-122"/>
@@ -13532,7 +13532,7 @@
             </a:avLst>
           </a:prstGeom>
           <a:solidFill>
-            <a:srgbClr val="0F1419"/>
+            <a:srgbClr val="0F1214"/>
           </a:solidFill>
           <a:ln/>
         </p:spPr>
@@ -13554,7 +13554,7 @@
             </a:avLst>
           </a:prstGeom>
           <a:solidFill>
-            <a:srgbClr val="3B82F6"/>
+            <a:srgbClr val="3B968F"/>
           </a:solidFill>
           <a:ln/>
         </p:spPr>
@@ -13568,7 +13568,7 @@
             <a:r>
               <a:rPr lang="en-US" sz="1500" b="1" dirty="0">
                 <a:solidFill>
-                  <a:srgbClr val="0F1419"/>
+                  <a:srgbClr val="0F1214"/>
                 </a:solidFill>
                 <a:latin typeface="Calibri" pitchFamily="34" charset="0"/>
                 <a:ea typeface="Calibri" pitchFamily="34" charset="-122"/>
@@ -13636,7 +13636,7 @@
             </a:avLst>
           </a:prstGeom>
           <a:solidFill>
-            <a:srgbClr val="0F1419"/>
+            <a:srgbClr val="0F1214"/>
           </a:solidFill>
           <a:ln/>
         </p:spPr>
@@ -13658,7 +13658,7 @@
             </a:avLst>
           </a:prstGeom>
           <a:solidFill>
-            <a:srgbClr val="3B82F6"/>
+            <a:srgbClr val="3B968F"/>
           </a:solidFill>
           <a:ln/>
         </p:spPr>
@@ -13672,7 +13672,7 @@
             <a:r>
               <a:rPr lang="en-US" sz="1500" b="1" dirty="0">
                 <a:solidFill>
-                  <a:srgbClr val="0F1419"/>
+                  <a:srgbClr val="0F1214"/>
                 </a:solidFill>
                 <a:latin typeface="Calibri" pitchFamily="34" charset="0"/>
                 <a:ea typeface="Calibri" pitchFamily="34" charset="-122"/>
@@ -13740,7 +13740,7 @@
             </a:avLst>
           </a:prstGeom>
           <a:solidFill>
-            <a:srgbClr val="0F1419"/>
+            <a:srgbClr val="0F1214"/>
           </a:solidFill>
           <a:ln/>
         </p:spPr>
@@ -13762,7 +13762,7 @@
             </a:avLst>
           </a:prstGeom>
           <a:solidFill>
-            <a:srgbClr val="3B82F6"/>
+            <a:srgbClr val="3B968F"/>
           </a:solidFill>
           <a:ln/>
         </p:spPr>
@@ -13776,7 +13776,7 @@
             <a:r>
               <a:rPr lang="en-US" sz="1500" b="1" dirty="0">
                 <a:solidFill>
-                  <a:srgbClr val="0F1419"/>
+                  <a:srgbClr val="0F1214"/>
                 </a:solidFill>
                 <a:latin typeface="Calibri" pitchFamily="34" charset="0"/>
                 <a:ea typeface="Calibri" pitchFamily="34" charset="-122"/>
@@ -13844,7 +13844,7 @@
             </a:avLst>
           </a:prstGeom>
           <a:solidFill>
-            <a:srgbClr val="0F1419"/>
+            <a:srgbClr val="0F1214"/>
           </a:solidFill>
           <a:ln/>
         </p:spPr>
@@ -13866,7 +13866,7 @@
             </a:avLst>
           </a:prstGeom>
           <a:solidFill>
-            <a:srgbClr val="3B82F6"/>
+            <a:srgbClr val="3B968F"/>
           </a:solidFill>
           <a:ln/>
         </p:spPr>
@@ -13880,7 +13880,7 @@
             <a:r>
               <a:rPr lang="en-US" sz="1500" b="1" dirty="0">
                 <a:solidFill>
-                  <a:srgbClr val="0F1419"/>
+                  <a:srgbClr val="0F1214"/>
                 </a:solidFill>
                 <a:latin typeface="Calibri" pitchFamily="34" charset="0"/>
                 <a:ea typeface="Calibri" pitchFamily="34" charset="-122"/>
@@ -13948,7 +13948,7 @@
             </a:avLst>
           </a:prstGeom>
           <a:solidFill>
-            <a:srgbClr val="0F1419"/>
+            <a:srgbClr val="0F1214"/>
           </a:solidFill>
           <a:ln/>
         </p:spPr>
@@ -13970,7 +13970,7 @@
             </a:avLst>
           </a:prstGeom>
           <a:solidFill>
-            <a:srgbClr val="3B82F6"/>
+            <a:srgbClr val="3B968F"/>
           </a:solidFill>
           <a:ln/>
         </p:spPr>
@@ -13984,7 +13984,7 @@
             <a:r>
               <a:rPr lang="en-US" sz="1500" b="1" dirty="0">
                 <a:solidFill>
-                  <a:srgbClr val="0F1419"/>
+                  <a:srgbClr val="0F1214"/>
                 </a:solidFill>
                 <a:latin typeface="Calibri" pitchFamily="34" charset="0"/>
                 <a:ea typeface="Calibri" pitchFamily="34" charset="-122"/>
